--- a/guruguru/guruguru_program_design.pptx
+++ b/guruguru/guruguru_program_design.pptx
@@ -3940,7 +3940,7 @@
                 </a:solidFill>
                 <a:latin typeface="Yu Gothic"/>
               </a:rPr>
-              <a:t>交渉力（5フォース）</a:t>
+              <a:t>交渉力分析</a:t>
             </a:r>
           </a:p>
         </p:txBody>
@@ -5324,7 +5324,23 @@
                 </a:solidFill>
                 <a:latin typeface="Yu Gothic"/>
               </a:rPr>
-              <a:t>③ 読む（ロールプレイ）　④ 動かす（提案・ピッチ）</a:t>
+              <a:t>③ 読む（ロールプレイ）</a:t>
+            </a:r>
+          </a:p>
+          <a:p>
+            <a:pPr algn="l">
+              <a:spcBef>
+                <a:spcPts val="400"/>
+              </a:spcBef>
+            </a:pPr>
+            <a:r>
+              <a:rPr sz="1300" b="0">
+                <a:solidFill>
+                  <a:srgbClr val="3A2A24"/>
+                </a:solidFill>
+                <a:latin typeface="Yu Gothic"/>
+              </a:rPr>
+              <a:t>④ 動かす（提案・ピッチ）</a:t>
             </a:r>
           </a:p>
         </p:txBody>

--- a/guruguru/guruguru_program_design.pptx
+++ b/guruguru/guruguru_program_design.pptx
@@ -3086,7 +3086,7 @@
     <p:bg>
       <p:bgPr>
         <a:solidFill>
-          <a:srgbClr val="FFEEE4"/>
+          <a:srgbClr val="FFFFFF"/>
         </a:solidFill>
         <a:effectLst/>
       </p:bgPr>
@@ -3106,8 +3106,8 @@
         </p:nvSpPr>
         <p:spPr>
           <a:xfrm>
-            <a:off x="0" y="6675120"/>
-            <a:ext cx="12191695" cy="182880"/>
+            <a:off x="0" y="6766560"/>
+            <a:ext cx="12191695" cy="91440"/>
           </a:xfrm>
           <a:prstGeom prst="rect">
             <a:avLst/>
@@ -3193,7 +3193,7 @@
             <a:r>
               <a:rPr sz="2000" b="1">
                 <a:solidFill>
-                  <a:srgbClr val="F06142"/>
+                  <a:srgbClr val="333333"/>
                 </a:solidFill>
                 <a:latin typeface="Yu Gothic"/>
               </a:rPr>
@@ -3252,7 +3252,7 @@
             <a:avLst/>
           </a:prstGeom>
           <a:solidFill>
-            <a:srgbClr val="F06142"/>
+            <a:srgbClr val="333333"/>
           </a:solidFill>
           <a:ln>
             <a:noFill/>
@@ -3291,7 +3291,7 @@
             <a:avLst/>
           </a:prstGeom>
           <a:solidFill>
-            <a:srgbClr val="F06142"/>
+            <a:srgbClr val="333333"/>
           </a:solidFill>
           <a:ln>
             <a:noFill/>
@@ -3330,7 +3330,7 @@
             <a:avLst/>
           </a:prstGeom>
           <a:solidFill>
-            <a:srgbClr val="F06142"/>
+            <a:srgbClr val="333333"/>
           </a:solidFill>
           <a:ln>
             <a:noFill/>
@@ -3369,7 +3369,7 @@
             <a:avLst/>
           </a:prstGeom>
           <a:solidFill>
-            <a:srgbClr val="F06142"/>
+            <a:srgbClr val="333333"/>
           </a:solidFill>
           <a:ln>
             <a:noFill/>
@@ -3408,7 +3408,7 @@
             <a:avLst/>
           </a:prstGeom>
           <a:solidFill>
-            <a:srgbClr val="F06142"/>
+            <a:srgbClr val="333333"/>
           </a:solidFill>
           <a:ln>
             <a:noFill/>
@@ -3447,7 +3447,7 @@
             <a:avLst/>
           </a:prstGeom>
           <a:solidFill>
-            <a:srgbClr val="FFE0D0"/>
+            <a:srgbClr val="F9ECE6"/>
           </a:solidFill>
           <a:ln>
             <a:noFill/>
@@ -3462,7 +3462,7 @@
             <a:r>
               <a:rPr sz="1500" b="1">
                 <a:solidFill>
-                  <a:srgbClr val="F06142"/>
+                  <a:srgbClr val="333333"/>
                 </a:solidFill>
                 <a:latin typeface="Yu Gothic"/>
               </a:rPr>
@@ -3474,7 +3474,7 @@
             <a:r>
               <a:rPr sz="1300" b="1">
                 <a:solidFill>
-                  <a:srgbClr val="F06142"/>
+                  <a:srgbClr val="333333"/>
                 </a:solidFill>
                 <a:latin typeface="Yu Gothic"/>
               </a:rPr>
@@ -3498,7 +3498,7 @@
             <a:avLst/>
           </a:prstGeom>
           <a:solidFill>
-            <a:srgbClr val="FFFFFF"/>
+            <a:srgbClr val="F4F4F4"/>
           </a:solidFill>
           <a:ln>
             <a:noFill/>
@@ -3537,7 +3537,7 @@
             <a:avLst/>
           </a:prstGeom>
           <a:solidFill>
-            <a:srgbClr val="FFFFFF"/>
+            <a:srgbClr val="F4F4F4"/>
           </a:solidFill>
           <a:ln>
             <a:noFill/>
@@ -3588,7 +3588,7 @@
             <a:avLst/>
           </a:prstGeom>
           <a:solidFill>
-            <a:srgbClr val="FFFFFF"/>
+            <a:srgbClr val="F4F4F4"/>
           </a:solidFill>
           <a:ln>
             <a:noFill/>
@@ -3639,7 +3639,7 @@
             <a:avLst/>
           </a:prstGeom>
           <a:solidFill>
-            <a:srgbClr val="FFFFFF"/>
+            <a:srgbClr val="F4F4F4"/>
           </a:solidFill>
           <a:ln>
             <a:noFill/>
@@ -3678,7 +3678,7 @@
             <a:avLst/>
           </a:prstGeom>
           <a:solidFill>
-            <a:srgbClr val="FFE0D0"/>
+            <a:srgbClr val="F9ECE6"/>
           </a:solidFill>
           <a:ln>
             <a:noFill/>
@@ -3693,7 +3693,7 @@
             <a:r>
               <a:rPr sz="1500" b="1">
                 <a:solidFill>
-                  <a:srgbClr val="F06142"/>
+                  <a:srgbClr val="333333"/>
                 </a:solidFill>
                 <a:latin typeface="Yu Gothic"/>
               </a:rPr>
@@ -3705,7 +3705,7 @@
             <a:r>
               <a:rPr sz="1300" b="1">
                 <a:solidFill>
-                  <a:srgbClr val="F06142"/>
+                  <a:srgbClr val="333333"/>
                 </a:solidFill>
                 <a:latin typeface="Yu Gothic"/>
               </a:rPr>
@@ -3729,7 +3729,7 @@
             <a:avLst/>
           </a:prstGeom>
           <a:solidFill>
-            <a:srgbClr val="FFFFFF"/>
+            <a:srgbClr val="F4F4F4"/>
           </a:solidFill>
           <a:ln>
             <a:noFill/>
@@ -3768,7 +3768,7 @@
             <a:avLst/>
           </a:prstGeom>
           <a:solidFill>
-            <a:srgbClr val="FFFFFF"/>
+            <a:srgbClr val="F4F4F4"/>
           </a:solidFill>
           <a:ln>
             <a:noFill/>
@@ -3819,7 +3819,7 @@
             <a:avLst/>
           </a:prstGeom>
           <a:solidFill>
-            <a:srgbClr val="FFFFFF"/>
+            <a:srgbClr val="F4F4F4"/>
           </a:solidFill>
           <a:ln>
             <a:noFill/>
@@ -3870,7 +3870,7 @@
             <a:avLst/>
           </a:prstGeom>
           <a:solidFill>
-            <a:srgbClr val="FFFFFF"/>
+            <a:srgbClr val="F4F4F4"/>
           </a:solidFill>
           <a:ln>
             <a:noFill/>
@@ -3909,7 +3909,7 @@
             <a:avLst/>
           </a:prstGeom>
           <a:solidFill>
-            <a:srgbClr val="FFE0D0"/>
+            <a:srgbClr val="F9ECE6"/>
           </a:solidFill>
           <a:ln>
             <a:noFill/>
@@ -3924,7 +3924,7 @@
             <a:r>
               <a:rPr sz="1500" b="1">
                 <a:solidFill>
-                  <a:srgbClr val="F06142"/>
+                  <a:srgbClr val="333333"/>
                 </a:solidFill>
                 <a:latin typeface="Yu Gothic"/>
               </a:rPr>
@@ -3936,7 +3936,7 @@
             <a:r>
               <a:rPr sz="1300" b="1">
                 <a:solidFill>
-                  <a:srgbClr val="F06142"/>
+                  <a:srgbClr val="333333"/>
                 </a:solidFill>
                 <a:latin typeface="Yu Gothic"/>
               </a:rPr>
@@ -3960,7 +3960,7 @@
             <a:avLst/>
           </a:prstGeom>
           <a:solidFill>
-            <a:srgbClr val="FFFFFF"/>
+            <a:srgbClr val="F4F4F4"/>
           </a:solidFill>
           <a:ln>
             <a:noFill/>
@@ -3999,7 +3999,7 @@
             <a:avLst/>
           </a:prstGeom>
           <a:solidFill>
-            <a:srgbClr val="FFFFFF"/>
+            <a:srgbClr val="F4F4F4"/>
           </a:solidFill>
           <a:ln>
             <a:noFill/>
@@ -4050,7 +4050,7 @@
             <a:avLst/>
           </a:prstGeom>
           <a:solidFill>
-            <a:srgbClr val="FFFFFF"/>
+            <a:srgbClr val="F4F4F4"/>
           </a:solidFill>
           <a:ln>
             <a:noFill/>
@@ -4101,7 +4101,7 @@
             <a:avLst/>
           </a:prstGeom>
           <a:solidFill>
-            <a:srgbClr val="FFFFFF"/>
+            <a:srgbClr val="F4F4F4"/>
           </a:solidFill>
           <a:ln>
             <a:noFill/>
@@ -4140,7 +4140,7 @@
             <a:avLst/>
           </a:prstGeom>
           <a:solidFill>
-            <a:srgbClr val="FFE0D0"/>
+            <a:srgbClr val="F9ECE6"/>
           </a:solidFill>
           <a:ln>
             <a:noFill/>
@@ -4155,7 +4155,7 @@
             <a:r>
               <a:rPr sz="1500" b="1">
                 <a:solidFill>
-                  <a:srgbClr val="F06142"/>
+                  <a:srgbClr val="333333"/>
                 </a:solidFill>
                 <a:latin typeface="Yu Gothic"/>
               </a:rPr>
@@ -4167,7 +4167,7 @@
             <a:r>
               <a:rPr sz="1300" b="1">
                 <a:solidFill>
-                  <a:srgbClr val="F06142"/>
+                  <a:srgbClr val="333333"/>
                 </a:solidFill>
                 <a:latin typeface="Yu Gothic"/>
               </a:rPr>
@@ -4191,7 +4191,7 @@
             <a:avLst/>
           </a:prstGeom>
           <a:solidFill>
-            <a:srgbClr val="FFFFFF"/>
+            <a:srgbClr val="F4F4F4"/>
           </a:solidFill>
           <a:ln>
             <a:noFill/>
@@ -4230,7 +4230,7 @@
             <a:avLst/>
           </a:prstGeom>
           <a:solidFill>
-            <a:srgbClr val="FFFFFF"/>
+            <a:srgbClr val="F4F4F4"/>
           </a:solidFill>
           <a:ln>
             <a:noFill/>
@@ -4281,7 +4281,7 @@
             <a:avLst/>
           </a:prstGeom>
           <a:solidFill>
-            <a:srgbClr val="FFFFFF"/>
+            <a:srgbClr val="F4F4F4"/>
           </a:solidFill>
           <a:ln>
             <a:noFill/>
@@ -4332,7 +4332,7 @@
             <a:avLst/>
           </a:prstGeom>
           <a:solidFill>
-            <a:srgbClr val="FFFFFF"/>
+            <a:srgbClr val="F4F4F4"/>
           </a:solidFill>
           <a:ln>
             <a:noFill/>
@@ -4371,7 +4371,7 @@
             <a:avLst/>
           </a:prstGeom>
           <a:solidFill>
-            <a:srgbClr val="FFE0D0"/>
+            <a:srgbClr val="F9ECE6"/>
           </a:solidFill>
           <a:ln>
             <a:noFill/>
@@ -4386,7 +4386,7 @@
             <a:r>
               <a:rPr sz="1400" b="1">
                 <a:solidFill>
-                  <a:srgbClr val="F06142"/>
+                  <a:srgbClr val="333333"/>
                 </a:solidFill>
                 <a:latin typeface="Yu Gothic"/>
               </a:rPr>
@@ -4425,7 +4425,7 @@
     <p:bg>
       <p:bgPr>
         <a:solidFill>
-          <a:srgbClr val="FFEEE4"/>
+          <a:srgbClr val="FFFFFF"/>
         </a:solidFill>
         <a:effectLst/>
       </p:bgPr>
@@ -4445,8 +4445,8 @@
         </p:nvSpPr>
         <p:spPr>
           <a:xfrm>
-            <a:off x="0" y="6675120"/>
-            <a:ext cx="12191695" cy="182880"/>
+            <a:off x="0" y="6766560"/>
+            <a:ext cx="12191695" cy="91440"/>
           </a:xfrm>
           <a:prstGeom prst="rect">
             <a:avLst/>
@@ -4532,7 +4532,7 @@
             <a:r>
               <a:rPr sz="2000" b="1">
                 <a:solidFill>
-                  <a:srgbClr val="F06142"/>
+                  <a:srgbClr val="333333"/>
                 </a:solidFill>
                 <a:latin typeface="Yu Gothic"/>
               </a:rPr>
@@ -4591,7 +4591,7 @@
             <a:avLst/>
           </a:prstGeom>
           <a:solidFill>
-            <a:srgbClr val="FFFFFF"/>
+            <a:srgbClr val="F4F4F4"/>
           </a:solidFill>
           <a:ln>
             <a:noFill/>
@@ -4632,7 +4632,7 @@
             <a:r>
               <a:rPr sz="1600" b="1">
                 <a:solidFill>
-                  <a:srgbClr val="F06142"/>
+                  <a:srgbClr val="333333"/>
                 </a:solidFill>
                 <a:latin typeface="Yu Gothic"/>
               </a:rPr>
@@ -4743,7 +4743,7 @@
             <a:avLst/>
           </a:prstGeom>
           <a:solidFill>
-            <a:srgbClr val="FFFFFF"/>
+            <a:srgbClr val="F4F4F4"/>
           </a:solidFill>
           <a:ln>
             <a:noFill/>
@@ -4784,7 +4784,7 @@
             <a:r>
               <a:rPr sz="1600" b="1">
                 <a:solidFill>
-                  <a:srgbClr val="F06142"/>
+                  <a:srgbClr val="333333"/>
                 </a:solidFill>
                 <a:latin typeface="Yu Gothic"/>
               </a:rPr>
@@ -4879,7 +4879,7 @@
             <a:avLst/>
           </a:prstGeom>
           <a:solidFill>
-            <a:srgbClr val="FFFFFF"/>
+            <a:srgbClr val="F4F4F4"/>
           </a:solidFill>
           <a:ln>
             <a:noFill/>
@@ -4920,7 +4920,7 @@
             <a:r>
               <a:rPr sz="1600" b="1">
                 <a:solidFill>
-                  <a:srgbClr val="F06142"/>
+                  <a:srgbClr val="333333"/>
                 </a:solidFill>
                 <a:latin typeface="Yu Gothic"/>
               </a:rPr>
@@ -5026,7 +5026,7 @@
             <a:r>
               <a:rPr sz="1600" b="1">
                 <a:solidFill>
-                  <a:srgbClr val="F06142"/>
+                  <a:srgbClr val="333333"/>
                 </a:solidFill>
                 <a:latin typeface="Yu Gothic"/>
               </a:rPr>
@@ -5089,7 +5089,7 @@
             <a:avLst/>
           </a:prstGeom>
           <a:solidFill>
-            <a:srgbClr val="FFFFFF"/>
+            <a:srgbClr val="F4F4F4"/>
           </a:solidFill>
           <a:ln>
             <a:noFill/>
@@ -5187,7 +5187,7 @@
             <a:avLst/>
           </a:prstGeom>
           <a:solidFill>
-            <a:srgbClr val="FFFFFF"/>
+            <a:srgbClr val="F4F4F4"/>
           </a:solidFill>
           <a:ln>
             <a:noFill/>
@@ -5285,7 +5285,7 @@
             <a:avLst/>
           </a:prstGeom>
           <a:solidFill>
-            <a:srgbClr val="FFFFFF"/>
+            <a:srgbClr val="F4F4F4"/>
           </a:solidFill>
           <a:ln>
             <a:noFill/>
@@ -5359,7 +5359,7 @@
     <p:bg>
       <p:bgPr>
         <a:solidFill>
-          <a:srgbClr val="FFEEE4"/>
+          <a:srgbClr val="FFFFFF"/>
         </a:solidFill>
         <a:effectLst/>
       </p:bgPr>
@@ -5379,8 +5379,8 @@
         </p:nvSpPr>
         <p:spPr>
           <a:xfrm>
-            <a:off x="0" y="6675120"/>
-            <a:ext cx="12191695" cy="182880"/>
+            <a:off x="0" y="6766560"/>
+            <a:ext cx="12191695" cy="91440"/>
           </a:xfrm>
           <a:prstGeom prst="rect">
             <a:avLst/>
@@ -5466,7 +5466,7 @@
             <a:r>
               <a:rPr sz="2000" b="1">
                 <a:solidFill>
-                  <a:srgbClr val="F06142"/>
+                  <a:srgbClr val="333333"/>
                 </a:solidFill>
                 <a:latin typeface="Yu Gothic"/>
               </a:rPr>
@@ -5549,7 +5549,7 @@
             <a:avLst/>
           </a:prstGeom>
           <a:solidFill>
-            <a:srgbClr val="FFFFFF"/>
+            <a:srgbClr val="F4F4F4"/>
           </a:solidFill>
           <a:ln>
             <a:noFill/>
@@ -5590,7 +5590,7 @@
             <a:r>
               <a:rPr sz="1500" b="1">
                 <a:solidFill>
-                  <a:srgbClr val="F06142"/>
+                  <a:srgbClr val="333333"/>
                 </a:solidFill>
                 <a:latin typeface="Yu Gothic"/>
               </a:rPr>
@@ -5649,7 +5649,7 @@
             <a:avLst/>
           </a:prstGeom>
           <a:solidFill>
-            <a:srgbClr val="FFFFFF"/>
+            <a:srgbClr val="F4F4F4"/>
           </a:solidFill>
           <a:ln>
             <a:noFill/>
@@ -5690,7 +5690,7 @@
             <a:r>
               <a:rPr sz="1500" b="1">
                 <a:solidFill>
-                  <a:srgbClr val="F06142"/>
+                  <a:srgbClr val="333333"/>
                 </a:solidFill>
                 <a:latin typeface="Yu Gothic"/>
               </a:rPr>
@@ -5749,7 +5749,7 @@
             <a:avLst/>
           </a:prstGeom>
           <a:solidFill>
-            <a:srgbClr val="FFFFFF"/>
+            <a:srgbClr val="F4F4F4"/>
           </a:solidFill>
           <a:ln>
             <a:noFill/>
@@ -5790,7 +5790,7 @@
             <a:r>
               <a:rPr sz="1500" b="1">
                 <a:solidFill>
-                  <a:srgbClr val="F06142"/>
+                  <a:srgbClr val="333333"/>
                 </a:solidFill>
                 <a:latin typeface="Yu Gothic"/>
               </a:rPr>
@@ -5849,7 +5849,7 @@
             <a:avLst/>
           </a:prstGeom>
           <a:solidFill>
-            <a:srgbClr val="FFFFFF"/>
+            <a:srgbClr val="F4F4F4"/>
           </a:solidFill>
           <a:ln>
             <a:noFill/>
@@ -5890,7 +5890,7 @@
             <a:r>
               <a:rPr sz="1500" b="1">
                 <a:solidFill>
-                  <a:srgbClr val="F06142"/>
+                  <a:srgbClr val="333333"/>
                 </a:solidFill>
                 <a:latin typeface="Yu Gothic"/>
               </a:rPr>
@@ -5949,7 +5949,7 @@
             <a:avLst/>
           </a:prstGeom>
           <a:solidFill>
-            <a:srgbClr val="FFE0D0"/>
+            <a:srgbClr val="F9ECE6"/>
           </a:solidFill>
           <a:ln>
             <a:noFill/>
@@ -5964,7 +5964,7 @@
             <a:r>
               <a:rPr sz="1500" b="1">
                 <a:solidFill>
-                  <a:srgbClr val="F06142"/>
+                  <a:srgbClr val="333333"/>
                 </a:solidFill>
                 <a:latin typeface="Yu Gothic"/>
               </a:rPr>
